--- a/deck/Спокойно у доски.pptx
+++ b/deck/Спокойно у доски.pptx
@@ -112,28 +112,28 @@
   <p:extLst>
     <p:ext uri="{521415D9-36F7-43E2-AB2F-B90AF26B5E84}">
       <p14:sectionLst xmlns:p14="http://schemas.microsoft.com/office/powerpoint/2010/main">
-        <p14:section name="Открытие" id="{ffbe4af3-559f-53be-8ce9-be6fbf8e24c1}">
+        <p14:section name="Открытие" id="{2e829e4a-c4d7-008a-c1a5-99f0fd1d0b2a}">
           <p14:sldIdLst>
             <p14:sldId id="256"/>
           </p14:sldIdLst>
         </p14:section>
-        <p14:section name="Проблема" id="{9ed41a41-3099-88e9-cd25-b7793a0a65bf}">
+        <p14:section name="Проблема" id="{bd4edb7e-58e1-c2b6-a7d1-b1a96b77dba5}">
           <p14:sldIdLst>
             <p14:sldId id="257"/>
           </p14:sldIdLst>
         </p14:section>
-        <p14:section name="Решение" id="{d2eb7dd6-5f75-e659-889a-6c8a6b6bdbd5}">
+        <p14:section name="Решение" id="{7e29d382-1641-98b8-f38c-619910c70763}">
           <p14:sldIdLst>
             <p14:sldId id="258"/>
             <p14:sldId id="259"/>
           </p14:sldIdLst>
         </p14:section>
-        <p14:section name="Рынок" id="{d17140a8-2fcb-0a1f-2fe9-3f8f6d54085f}">
+        <p14:section name="Рынок" id="{cf35df82-c570-63f4-6ed1-49e34cac6919}">
           <p14:sldIdLst>
             <p14:sldId id="260"/>
           </p14:sldIdLst>
         </p14:section>
-        <p14:section name="Итог" id="{cf07b2dc-3b3d-b36e-831d-f89c7ee2b4b8}">
+        <p14:section name="Итог" id="{b5d132aa-0ba2-a7c4-d4ad-39467c063fe6}">
           <p14:sldIdLst>
             <p14:sldId id="261"/>
           </p14:sldIdLst>
@@ -542,7 +542,7 @@
           <a:p>
             <a:r>
               <a:rPr lang="en-US" dirty="0"/>
-              <a:t>ЗАМЕНИТЬ «Фамилия Имя» на своё. Представиться и назвать проект одной фразой: тренажёр, который помогает школьнику не бояться отвечать у доски.</a:t>
+              <a:t>Представиться и назвать проект одной фразой: тренажёр, который помогает школьнику не бояться отвечать у доски.</a:t>
             </a:r>
             <a:endParaRPr lang="en-US" dirty="0"/>
           </a:p>
@@ -982,7 +982,7 @@
           <a:p>
             <a:r>
               <a:rPr lang="en-US" dirty="0"/>
-              <a:t>ЗАМЕНИТЬ «Фамилия Имя». Закончить на планах и поблагодарить.</a:t>
+              <a:t>Закончить на планах и поблагодарить.</a:t>
             </a:r>
             <a:endParaRPr lang="en-US" dirty="0"/>
           </a:p>
@@ -1792,7 +1792,7 @@
                   <a:srgbClr val="FFFFFF"/>
                 </a:solidFill>
               </a:rPr>
-              <a:t>Фамилия Имя</a:t>
+              <a:t>Батыршин Ильназ</a:t>
             </a:r>
             <a:endParaRPr lang="en-US" sz="1900" dirty="0"/>
           </a:p>
@@ -5020,7 +5020,7 @@
                   <a:srgbClr val="6E8E94"/>
                 </a:solidFill>
               </a:rPr>
-              <a:t>Фамилия Имя · Лицей-интернат имени Мустафы Онджеля</a:t>
+              <a:t>Батыршин Ильназ · Лицей-интернат имени Мустафы Онджеля</a:t>
             </a:r>
             <a:endParaRPr lang="en-US" sz="2200" dirty="0"/>
           </a:p>

--- a/deck/Спокойно у доски.pptx
+++ b/deck/Спокойно у доски.pptx
@@ -10,10 +10,9 @@
     <p:sldId id="258" r:id="rId4"/>
     <p:sldId id="259" r:id="rId5"/>
     <p:sldId id="260" r:id="rId6"/>
-    <p:sldId id="261" r:id="rId7"/>
   </p:sldIdLst>
   <p:notesMasterIdLst>
-    <p:notesMasterId r:id="rId8"/>
+    <p:notesMasterId r:id="rId7"/>
   </p:notesMasterIdLst>
   <p:sldSz cx="12192000" cy="6858000"/>
   <p:notesSz cx="6858000" cy="12192000"/>
@@ -112,30 +111,29 @@
   <p:extLst>
     <p:ext uri="{521415D9-36F7-43E2-AB2F-B90AF26B5E84}">
       <p14:sectionLst xmlns:p14="http://schemas.microsoft.com/office/powerpoint/2010/main">
-        <p14:section name="Открытие" id="{2e829e4a-c4d7-008a-c1a5-99f0fd1d0b2a}">
+        <p14:section name="Открытие" id="{885f2e85-c2c5-c5fb-44db-57f96864635a}">
           <p14:sldIdLst>
             <p14:sldId id="256"/>
           </p14:sldIdLst>
         </p14:section>
-        <p14:section name="Проблема" id="{bd4edb7e-58e1-c2b6-a7d1-b1a96b77dba5}">
+        <p14:section name="Проблема" id="{01eb1c6b-191e-2cb9-6283-86a517d3e563}">
           <p14:sldIdLst>
             <p14:sldId id="257"/>
           </p14:sldIdLst>
         </p14:section>
-        <p14:section name="Решение" id="{7e29d382-1641-98b8-f38c-619910c70763}">
+        <p14:section name="Решение" id="{82e767aa-6d98-63c5-f908-c2a64e2571f1}">
           <p14:sldIdLst>
             <p14:sldId id="258"/>
+          </p14:sldIdLst>
+        </p14:section>
+        <p14:section name="Рынок" id="{48162c82-73de-7255-44db-45c907778989}">
+          <p14:sldIdLst>
             <p14:sldId id="259"/>
           </p14:sldIdLst>
         </p14:section>
-        <p14:section name="Рынок" id="{cf35df82-c570-63f4-6ed1-49e34cac6919}">
+        <p14:section name="Итог" id="{f9eca94b-952f-8650-fc6e-6fdea4f01d0f}">
           <p14:sldIdLst>
             <p14:sldId id="260"/>
-          </p14:sldIdLst>
-        </p14:section>
-        <p14:section name="Итог" id="{b5d132aa-0ba2-a7c4-d4ad-39467c063fe6}">
-          <p14:sldIdLst>
-            <p14:sldId id="261"/>
           </p14:sldIdLst>
         </p14:section>
       </p14:sectionLst>
@@ -806,7 +804,7 @@
           <a:p>
             <a:r>
               <a:rPr lang="en-US" dirty="0"/>
-              <a:t>Сайт открыть ЗАРАНЕЕ и не закрывать вкладку. Держать скриншоты на случай сбоя сети. Предложить жюри самим выбрать тему на колесе — так убедительнее.</a:t>
+              <a:t>Цена 29 990 ₽ — реальный онлайн-курс ораторского искусства, найден в открытом доступе. Главная мысль слайда: мы решаем узкую задачу быстро, а не учим ораторскому мастерству вообще.</a:t>
             </a:r>
             <a:endParaRPr lang="en-US" dirty="0"/>
           </a:p>
@@ -894,7 +892,7 @@
           <a:p>
             <a:r>
               <a:rPr lang="en-US" dirty="0"/>
-              <a:t>Цена 29 990 ₽ — реальный онлайн-курс ораторского искусства, найден в открытом доступе. Главная мысль слайда: мы решаем узкую задачу быстро, а не учим ораторскому мастерству вообще.</a:t>
+              <a:t>Закончить на планах и поблагодарить.</a:t>
             </a:r>
             <a:endParaRPr lang="en-US" dirty="0"/>
           </a:p>
@@ -918,94 +916,6 @@
             <a:fld id="{F7021451-1387-4CA6-816F-3879F97B5CBC}" type="slidenum">
               <a:rPr lang="en-US"/>
               <a:t>5</a:t>
-            </a:fld>
-            <a:endParaRPr lang="en-US"/>
-          </a:p>
-        </p:txBody>
-      </p:sp>
-    </p:spTree>
-    <p:extLst>
-      <p:ext uri="{BB962C8B-B14F-4D97-AF65-F5344CB8AC3E}">
-        <p14:creationId xmlns:p14="http://schemas.microsoft.com/office/powerpoint/2010/main" val="1024086991"/>
-      </p:ext>
-    </p:extLst>
-  </p:cSld>
-  <p:clrMapOvr>
-    <a:masterClrMapping/>
-  </p:clrMapOvr>
-</p:notes>
-</file>
-
-<file path=ppt/notesSlides/notesSlide6.xml><?xml version="1.0" encoding="utf-8"?>
-<p:notes xmlns:a="http://schemas.openxmlformats.org/drawingml/2006/main" xmlns:r="http://schemas.openxmlformats.org/officeDocument/2006/relationships" xmlns:p="http://schemas.openxmlformats.org/presentationml/2006/main">
-  <p:cSld>
-    <p:spTree>
-      <p:nvGrpSpPr>
-        <p:cNvPr id="1" name=""/>
-        <p:cNvGrpSpPr/>
-        <p:nvPr/>
-      </p:nvGrpSpPr>
-      <p:grpSpPr>
-        <a:xfrm>
-          <a:off x="0" y="0"/>
-          <a:ext cx="0" cy="0"/>
-          <a:chOff x="0" y="0"/>
-          <a:chExt cx="0" cy="0"/>
-        </a:xfrm>
-      </p:grpSpPr>
-      <p:sp>
-        <p:nvSpPr>
-          <p:cNvPr id="2" name="Slide Image Placeholder 1"/>
-          <p:cNvSpPr>
-            <a:spLocks noGrp="1" noRot="1" noChangeAspect="1"/>
-          </p:cNvSpPr>
-          <p:nvPr>
-            <p:ph type="sldImg"/>
-          </p:nvPr>
-        </p:nvSpPr>
-        <p:spPr/>
-      </p:sp>
-      <p:sp>
-        <p:nvSpPr>
-          <p:cNvPr id="3" name="Notes Placeholder 2"/>
-          <p:cNvSpPr>
-            <a:spLocks noGrp="1"/>
-          </p:cNvSpPr>
-          <p:nvPr>
-            <p:ph type="body" idx="1"/>
-          </p:nvPr>
-        </p:nvSpPr>
-        <p:spPr/>
-        <p:txBody>
-          <a:bodyPr/>
-          <a:lstStyle/>
-          <a:p>
-            <a:r>
-              <a:rPr lang="en-US" dirty="0"/>
-              <a:t>Закончить на планах и поблагодарить.</a:t>
-            </a:r>
-            <a:endParaRPr lang="en-US" dirty="0"/>
-          </a:p>
-        </p:txBody>
-      </p:sp>
-      <p:sp>
-        <p:nvSpPr>
-          <p:cNvPr id="4" name="Slide Number Placeholder 3"/>
-          <p:cNvSpPr>
-            <a:spLocks noGrp="1"/>
-          </p:cNvSpPr>
-          <p:nvPr>
-            <p:ph type="sldNum" sz="quarter" idx="10"/>
-          </p:nvPr>
-        </p:nvSpPr>
-        <p:spPr/>
-        <p:txBody>
-          <a:bodyPr/>
-          <a:lstStyle/>
-          <a:p>
-            <a:fld id="{F7021451-1387-4CA6-816F-3879F97B5CBC}" type="slidenum">
-              <a:rPr lang="en-US"/>
-              <a:t>6</a:t>
             </a:fld>
             <a:endParaRPr lang="en-US"/>
           </a:p>
@@ -2689,179 +2599,6 @@
         </p:nvSpPr>
         <p:spPr>
           <a:xfrm>
-            <a:off x="640080" y="914400"/>
-            <a:ext cx="10881360" cy="914400"/>
-          </a:xfrm>
-          <a:prstGeom prst="rect">
-            <a:avLst/>
-          </a:prstGeom>
-          <a:noFill/>
-          <a:ln/>
-        </p:spPr>
-        <p:txBody>
-          <a:bodyPr wrap="square" lIns="0" tIns="0" rIns="0" bIns="0" rtlCol="0" anchor="ctr"/>
-          <a:lstStyle/>
-          <a:p>
-            <a:pPr algn="l" indent="0" marL="0">
-              <a:buNone/>
-            </a:pPr>
-            <a:r>
-              <a:rPr lang="en-US" sz="4000" b="1" dirty="0">
-                <a:solidFill>
-                  <a:srgbClr val="FFFFFF"/>
-                </a:solidFill>
-              </a:rPr>
-              <a:t>Попробуем прямо сейчас</a:t>
-            </a:r>
-            <a:endParaRPr lang="en-US" sz="4000" dirty="0"/>
-          </a:p>
-        </p:txBody>
-      </p:sp>
-      <p:sp>
-        <p:nvSpPr>
-          <p:cNvPr id="3" name="Text 1"/>
-          <p:cNvSpPr txBox="1"/>
-          <p:nvPr/>
-        </p:nvSpPr>
-        <p:spPr>
-          <a:xfrm>
-            <a:off x="640080" y="2240280"/>
-            <a:ext cx="8686800" cy="822960"/>
-          </a:xfrm>
-          <a:prstGeom prst="rect">
-            <a:avLst/>
-          </a:prstGeom>
-          <a:noFill/>
-          <a:ln/>
-        </p:spPr>
-        <p:txBody>
-          <a:bodyPr wrap="square" lIns="0" tIns="0" rIns="0" bIns="0" rtlCol="0" anchor="t"/>
-          <a:lstStyle/>
-          <a:p>
-            <a:pPr indent="0" marL="0">
-              <a:buNone/>
-            </a:pPr>
-            <a:r>
-              <a:rPr lang="en-US" sz="2000" dirty="0">
-                <a:solidFill>
-                  <a:srgbClr val="C5DADD"/>
-                </a:solidFill>
-              </a:rPr>
-              <a:t>Откройте сайт на телефоне, выберите тему и запишите ответ за минуту — это весь путь ученика</a:t>
-            </a:r>
-            <a:endParaRPr lang="en-US" sz="2000" dirty="0"/>
-          </a:p>
-        </p:txBody>
-      </p:sp>
-      <p:sp>
-        <p:nvSpPr>
-          <p:cNvPr id="4" name="адрес сайта"/>
-          <p:cNvSpPr/>
-          <p:nvPr/>
-        </p:nvSpPr>
-        <p:spPr>
-          <a:xfrm>
-            <a:off x="640080" y="3429000"/>
-            <a:ext cx="5120640" cy="914400"/>
-          </a:xfrm>
-          <a:prstGeom prst="roundRect">
-            <a:avLst>
-              <a:gd name="adj" fmla="val 12000"/>
-            </a:avLst>
-          </a:prstGeom>
-          <a:solidFill>
-            <a:srgbClr val="02C39A"/>
-          </a:solidFill>
-          <a:ln/>
-        </p:spPr>
-        <p:txBody>
-          <a:bodyPr wrap="square" rtlCol="0" anchor="ctr"/>
-          <a:lstStyle/>
-          <a:p>
-            <a:pPr algn="ctr" indent="0" marL="0">
-              <a:buNone/>
-            </a:pPr>
-            <a:r>
-              <a:rPr lang="en-US" sz="2400" b="1" dirty="0">
-                <a:solidFill>
-                  <a:srgbClr val="04414F"/>
-                </a:solidFill>
-              </a:rPr>
-              <a:t>govor.tatnet.app</a:t>
-            </a:r>
-            <a:endParaRPr lang="en-US" sz="2400" dirty="0"/>
-          </a:p>
-        </p:txBody>
-      </p:sp>
-      <p:sp>
-        <p:nvSpPr>
-          <p:cNvPr id="5" name="Text 3"/>
-          <p:cNvSpPr txBox="1"/>
-          <p:nvPr/>
-        </p:nvSpPr>
-        <p:spPr>
-          <a:xfrm>
-            <a:off x="640080" y="4572000"/>
-            <a:ext cx="8686800" cy="457200"/>
-          </a:xfrm>
-          <a:prstGeom prst="rect">
-            <a:avLst/>
-          </a:prstGeom>
-          <a:noFill/>
-          <a:ln/>
-        </p:spPr>
-        <p:txBody>
-          <a:bodyPr wrap="square" lIns="0" tIns="0" rIns="0" bIns="0" rtlCol="0" anchor="t"/>
-          <a:lstStyle/>
-          <a:p>
-            <a:pPr indent="0" marL="0">
-              <a:buNone/>
-            </a:pPr>
-            <a:r>
-              <a:rPr lang="en-US" sz="1400" dirty="0">
-                <a:solidFill>
-                  <a:srgbClr val="8FAEB3"/>
-                </a:solidFill>
-              </a:rPr>
-              <a:t>Работает в браузере телефона. Ничего не нужно устанавливать, регистрация нужна только для рейтинга.</a:t>
-            </a:r>
-            <a:endParaRPr lang="en-US" sz="1400" dirty="0"/>
-          </a:p>
-        </p:txBody>
-      </p:sp>
-    </p:spTree>
-  </p:cSld>
-  <p:clrMapOvr>
-    <a:masterClrMapping/>
-  </p:clrMapOvr>
-</p:sld>
-</file>
-
-<file path=ppt/slides/slide5.xml><?xml version="1.0" encoding="utf-8"?>
-<p:sld xmlns:a="http://schemas.openxmlformats.org/drawingml/2006/main" xmlns:r="http://schemas.openxmlformats.org/officeDocument/2006/relationships" xmlns:p="http://schemas.openxmlformats.org/presentationml/2006/main">
-  <p:cSld name="Slide 5">
-    <p:spTree>
-      <p:nvGrpSpPr>
-        <p:cNvPr id="1" name=""/>
-        <p:cNvGrpSpPr/>
-        <p:nvPr/>
-      </p:nvGrpSpPr>
-      <p:grpSpPr>
-        <a:xfrm>
-          <a:off x="0" y="0"/>
-          <a:ext cx="0" cy="0"/>
-          <a:chOff x="0" y="0"/>
-          <a:chExt cx="0" cy="0"/>
-        </a:xfrm>
-      </p:grpSpPr>
-      <p:sp>
-        <p:nvSpPr>
-          <p:cNvPr id="2" name="Text 0"/>
-          <p:cNvSpPr txBox="1"/>
-          <p:nvPr/>
-        </p:nvSpPr>
-        <p:spPr>
-          <a:xfrm>
             <a:off x="640080" y="411480"/>
             <a:ext cx="10881360" cy="822960"/>
           </a:xfrm>
@@ -2890,9 +2627,45 @@
           </a:p>
         </p:txBody>
       </p:sp>
+      <p:sp>
+        <p:nvSpPr>
+          <p:cNvPr id="3" name="Text 1"/>
+          <p:cNvSpPr txBox="1"/>
+          <p:nvPr/>
+        </p:nvSpPr>
+        <p:spPr>
+          <a:xfrm>
+            <a:off x="640080" y="1371600"/>
+            <a:ext cx="10881360" cy="640080"/>
+          </a:xfrm>
+          <a:prstGeom prst="rect">
+            <a:avLst/>
+          </a:prstGeom>
+          <a:noFill/>
+          <a:ln/>
+        </p:spPr>
+        <p:txBody>
+          <a:bodyPr wrap="square" lIns="0" tIns="0" rIns="0" bIns="0" rtlCol="0" anchor="t"/>
+          <a:lstStyle/>
+          <a:p>
+            <a:pPr indent="0" marL="0">
+              <a:buNone/>
+            </a:pPr>
+            <a:r>
+              <a:rPr lang="en-US" sz="1500" b="1" dirty="0">
+                <a:solidFill>
+                  <a:srgbClr val="04414F"/>
+                </a:solidFill>
+              </a:rPr>
+              <a:t>Курсы учат выступать вообще. Здесь решается одна конкретная ситуация — ответ у доски, и тренировка занимает минуту, а не недели.</a:t>
+            </a:r>
+            <a:endParaRPr lang="en-US" sz="1500" dirty="0"/>
+          </a:p>
+        </p:txBody>
+      </p:sp>
       <p:graphicFrame>
         <p:nvGraphicFramePr>
-          <p:cNvPr id="6" name="сравнение"/>
+          <p:cNvPr id="5" name="сравнение"/>
           <p:cNvGraphicFramePr>
             <a:graphicFrameLocks noGrp="1"/>
           </p:cNvGraphicFramePr>
@@ -2905,7 +2678,7 @@
           </p:nvPr>
         </p:nvGraphicFramePr>
         <p:xfrm>
-          <a:off x="640080" y="1600200"/>
+          <a:off x="640080" y="2148840"/>
           <a:ext cx="10881360" cy="914400"/>
         </p:xfrm>
         <a:graphic>
@@ -2913,10 +2686,10 @@
             <a:tbl>
               <a:tblPr/>
               <a:tblGrid>
-                <a:gridCol w="3657600"/>
-                <a:gridCol w="2651760"/>
-                <a:gridCol w="2286000"/>
-                <a:gridCol w="2286000"/>
+                <a:gridCol w="4023360"/>
+                <a:gridCol w="2468880"/>
+                <a:gridCol w="2377440"/>
+                <a:gridCol w="2011680"/>
               </a:tblGrid>
               <a:tr h="411480">
                 <a:tc>
@@ -3414,7 +3187,7 @@
                           <a:ea typeface="Calibri" pitchFamily="34" charset="-122"/>
                           <a:cs typeface="Calibri" pitchFamily="34" charset="-120"/>
                         </a:rPr>
-                        <a:t>да, от преподавателя</a:t>
+                        <a:t>да</a:t>
                       </a:r>
                       <a:endParaRPr lang="en-US" sz="1300" dirty="0">
                         <a:latin typeface="Calibri" charset="0"/>
@@ -3552,7 +3325,7 @@
                           <a:ea typeface="Calibri" pitchFamily="34" charset="-122"/>
                           <a:cs typeface="Calibri" pitchFamily="34" charset="-120"/>
                         </a:rPr>
-                        <a:t>платно, за занятие</a:t>
+                        <a:t>платно</a:t>
                       </a:r>
                       <a:endParaRPr lang="en-US" sz="1300" dirty="0">
                         <a:latin typeface="Calibri" charset="0"/>
@@ -3962,7 +3735,7 @@
                           <a:ea typeface="Calibri" pitchFamily="34" charset="-122"/>
                           <a:cs typeface="Calibri" pitchFamily="34" charset="-120"/>
                         </a:rPr>
-                        <a:t>нет, но надо прийти</a:t>
+                        <a:t>нет</a:t>
                       </a:r>
                       <a:endParaRPr lang="en-US" sz="1300" dirty="0">
                         <a:latin typeface="Calibri" charset="0"/>
@@ -4236,7 +4009,7 @@
                           <a:ea typeface="Calibri" pitchFamily="34" charset="-122"/>
                           <a:cs typeface="Calibri" pitchFamily="34" charset="-120"/>
                         </a:rPr>
-                        <a:t>нет, но это просто текст</a:t>
+                        <a:t>нет</a:t>
                       </a:r>
                       <a:endParaRPr lang="en-US" sz="1300" dirty="0">
                         <a:latin typeface="Calibri" charset="0"/>
@@ -4510,7 +4283,7 @@
                           <a:ea typeface="Calibri" pitchFamily="34" charset="-122"/>
                           <a:cs typeface="Calibri" pitchFamily="34" charset="-120"/>
                         </a:rPr>
-                        <a:t>нет, в этом суть</a:t>
+                        <a:t>нет</a:t>
                       </a:r>
                       <a:endParaRPr lang="en-US" sz="1300" dirty="0">
                         <a:latin typeface="Calibri" charset="0"/>
@@ -4566,42 +4339,6 @@
           </a:graphicData>
         </a:graphic>
       </p:graphicFrame>
-      <p:sp>
-        <p:nvSpPr>
-          <p:cNvPr id="4" name="Text 1"/>
-          <p:cNvSpPr txBox="1"/>
-          <p:nvPr/>
-        </p:nvSpPr>
-        <p:spPr>
-          <a:xfrm>
-            <a:off x="640080" y="4480560"/>
-            <a:ext cx="10881360" cy="640080"/>
-          </a:xfrm>
-          <a:prstGeom prst="rect">
-            <a:avLst/>
-          </a:prstGeom>
-          <a:noFill/>
-          <a:ln/>
-        </p:spPr>
-        <p:txBody>
-          <a:bodyPr wrap="square" lIns="0" tIns="0" rIns="0" bIns="0" rtlCol="0" anchor="t"/>
-          <a:lstStyle/>
-          <a:p>
-            <a:pPr indent="0" marL="0">
-              <a:buNone/>
-            </a:pPr>
-            <a:r>
-              <a:rPr lang="en-US" sz="1500" b="1" dirty="0">
-                <a:solidFill>
-                  <a:srgbClr val="04414F"/>
-                </a:solidFill>
-              </a:rPr>
-              <a:t>Курсы учат выступать вообще. Здесь решается одна конкретная ситуация — ответ у доски, и тренировка занимает минуту, а не недели.</a:t>
-            </a:r>
-            <a:endParaRPr lang="en-US" sz="1500" dirty="0"/>
-          </a:p>
-        </p:txBody>
-      </p:sp>
       <p:sp>
         <p:nvSpPr>
           <p:cNvPr id="25" name="Slide Number Placeholder 0"/>
@@ -4641,7 +4378,7 @@
             <a:pPr algn="r"/>
             <a:fld id="{F7021451-1387-4CA6-816F-3879F97B5CBC}" type="slidenum">
               <a:rPr b="0" lang="en-US"/>
-              <a:t>5</a:t>
+              <a:t>4</a:t>
             </a:fld>
             <a:endParaRPr lang="en-US"/>
           </a:p>
@@ -4655,9 +4392,9 @@
 </p:sld>
 </file>
 
-<file path=ppt/slides/slide6.xml><?xml version="1.0" encoding="utf-8"?>
+<file path=ppt/slides/slide5.xml><?xml version="1.0" encoding="utf-8"?>
 <p:sld xmlns:a="http://schemas.openxmlformats.org/drawingml/2006/main" xmlns:r="http://schemas.openxmlformats.org/officeDocument/2006/relationships" xmlns:p="http://schemas.openxmlformats.org/presentationml/2006/main">
-  <p:cSld name="Slide 6">
+  <p:cSld name="Slide 5">
     <p:spTree>
       <p:nvGrpSpPr>
         <p:cNvPr id="1" name=""/>

--- a/deck/Спокойно у доски.pptx
+++ b/deck/Спокойно у доски.pptx
@@ -111,27 +111,27 @@
   <p:extLst>
     <p:ext uri="{521415D9-36F7-43E2-AB2F-B90AF26B5E84}">
       <p14:sectionLst xmlns:p14="http://schemas.microsoft.com/office/powerpoint/2010/main">
-        <p14:section name="Открытие" id="{885f2e85-c2c5-c5fb-44db-57f96864635a}">
+        <p14:section name="Открытие" id="{220ccf67-300e-7be4-6dee-0778abb4cafe}">
           <p14:sldIdLst>
             <p14:sldId id="256"/>
           </p14:sldIdLst>
         </p14:section>
-        <p14:section name="Проблема" id="{01eb1c6b-191e-2cb9-6283-86a517d3e563}">
+        <p14:section name="Проблема" id="{dec8f163-97e9-d41d-5a2e-a63214e4abbd}">
           <p14:sldIdLst>
             <p14:sldId id="257"/>
           </p14:sldIdLst>
         </p14:section>
-        <p14:section name="Решение" id="{82e767aa-6d98-63c5-f908-c2a64e2571f1}">
+        <p14:section name="Решение" id="{9067cd9c-963a-1098-b5ec-66fd05b64569}">
           <p14:sldIdLst>
             <p14:sldId id="258"/>
           </p14:sldIdLst>
         </p14:section>
-        <p14:section name="Рынок" id="{48162c82-73de-7255-44db-45c907778989}">
+        <p14:section name="Рынок" id="{5fb9bddc-716c-8c83-c212-ebce6a728fcb}">
           <p14:sldIdLst>
             <p14:sldId id="259"/>
           </p14:sldIdLst>
         </p14:section>
-        <p14:section name="Итог" id="{f9eca94b-952f-8650-fc6e-6fdea4f01d0f}">
+        <p14:section name="Итог" id="{a0a5bcfc-3b8e-24f3-7579-5c021df57f03}">
           <p14:sldIdLst>
             <p14:sldId id="260"/>
           </p14:sldIdLst>
@@ -4453,12 +4453,12 @@
         </p:nvSpPr>
         <p:spPr>
           <a:xfrm>
-            <a:off x="640080" y="2194560"/>
-            <a:ext cx="3413760" cy="1554480"/>
+            <a:off x="640080" y="2103120"/>
+            <a:ext cx="3413760" cy="1188720"/>
           </a:xfrm>
           <a:prstGeom prst="roundRect">
             <a:avLst>
-              <a:gd name="adj" fmla="val 5882"/>
+              <a:gd name="adj" fmla="val 7692"/>
             </a:avLst>
           </a:prstGeom>
           <a:solidFill>
@@ -4467,7 +4467,7 @@
           <a:ln/>
         </p:spPr>
         <p:txBody>
-          <a:bodyPr wrap="square" lIns="152400" tIns="203200" rIns="203200" bIns="152400" rtlCol="0" anchor="ctr"/>
+          <a:bodyPr wrap="square" lIns="152400" tIns="177800" rIns="177800" bIns="152400" rtlCol="0" anchor="t"/>
           <a:lstStyle/>
           <a:p>
             <a:pPr algn="l" indent="0" marL="0">
@@ -4507,7 +4507,7 @@
                   <a:srgbClr val="C5DADD"/>
                 </a:solidFill>
               </a:rPr>
-              <a:t>проговорить ответ вслух, а не только записать тезисы</a:t>
+              <a:t>проговорить ответ вслух</a:t>
             </a:r>
             <a:endParaRPr lang="en-US" sz="1600" dirty="0"/>
           </a:p>
@@ -4521,12 +4521,12 @@
         </p:nvSpPr>
         <p:spPr>
           <a:xfrm>
-            <a:off x="4373880" y="2194560"/>
-            <a:ext cx="3413760" cy="1554480"/>
+            <a:off x="4373880" y="2103120"/>
+            <a:ext cx="3413760" cy="1188720"/>
           </a:xfrm>
           <a:prstGeom prst="roundRect">
             <a:avLst>
-              <a:gd name="adj" fmla="val 5882"/>
+              <a:gd name="adj" fmla="val 7692"/>
             </a:avLst>
           </a:prstGeom>
           <a:solidFill>
@@ -4535,7 +4535,7 @@
           <a:ln/>
         </p:spPr>
         <p:txBody>
-          <a:bodyPr wrap="square" lIns="152400" tIns="203200" rIns="203200" bIns="152400" rtlCol="0" anchor="ctr"/>
+          <a:bodyPr wrap="square" lIns="152400" tIns="177800" rIns="177800" bIns="152400" rtlCol="0" anchor="t"/>
           <a:lstStyle/>
           <a:p>
             <a:pPr algn="l" indent="0" marL="0">
@@ -4575,7 +4575,7 @@
                   <a:srgbClr val="C5DADD"/>
                 </a:solidFill>
               </a:rPr>
-              <a:t>биология, история, литература — под реальные уроки</a:t>
+              <a:t>биология, история, литература</a:t>
             </a:r>
             <a:endParaRPr lang="en-US" sz="1600" dirty="0"/>
           </a:p>
@@ -4589,12 +4589,12 @@
         </p:nvSpPr>
         <p:spPr>
           <a:xfrm>
-            <a:off x="8107680" y="2194560"/>
-            <a:ext cx="3413760" cy="1554480"/>
+            <a:off x="8107680" y="2103120"/>
+            <a:ext cx="3413760" cy="1188720"/>
           </a:xfrm>
           <a:prstGeom prst="roundRect">
             <a:avLst>
-              <a:gd name="adj" fmla="val 5882"/>
+              <a:gd name="adj" fmla="val 7692"/>
             </a:avLst>
           </a:prstGeom>
           <a:solidFill>
@@ -4603,7 +4603,7 @@
           <a:ln/>
         </p:spPr>
         <p:txBody>
-          <a:bodyPr wrap="square" lIns="152400" tIns="203200" rIns="203200" bIns="152400" rtlCol="0" anchor="ctr"/>
+          <a:bodyPr wrap="square" lIns="152400" tIns="177800" rIns="177800" bIns="152400" rtlCol="0" anchor="t"/>
           <a:lstStyle/>
           <a:p>
             <a:pPr algn="l" indent="0" marL="0">
@@ -4643,7 +4643,7 @@
                   <a:srgbClr val="C5DADD"/>
                 </a:solidFill>
               </a:rPr>
-              <a:t>учитель открывает тренажёр для всего класса</a:t>
+              <a:t>учитель открывает всему классу</a:t>
             </a:r>
             <a:endParaRPr lang="en-US" sz="1600" dirty="0"/>
           </a:p>
@@ -4657,8 +4657,8 @@
         </p:nvSpPr>
         <p:spPr>
           <a:xfrm>
-            <a:off x="640080" y="4023360"/>
-            <a:ext cx="10881360" cy="731520"/>
+            <a:off x="640080" y="3611880"/>
+            <a:ext cx="10881360" cy="457200"/>
           </a:xfrm>
           <a:prstGeom prst="rect">
             <a:avLst/>
@@ -4679,7 +4679,7 @@
                   <a:srgbClr val="C5DADD"/>
                 </a:solidFill>
               </a:rPr>
-              <a:t>Начать можно с одного класса: тренажёр ничего не стоит и не требует разрешений — достаточно открыть ссылку</a:t>
+              <a:t>Начать можно с одного класса: тренажёр ничего не стоит и не требует разрешений</a:t>
             </a:r>
             <a:endParaRPr lang="en-US" sz="1500" dirty="0"/>
           </a:p>
@@ -4693,8 +4693,8 @@
         </p:nvSpPr>
         <p:spPr>
           <a:xfrm>
-            <a:off x="640080" y="4892040"/>
-            <a:ext cx="9144000" cy="1463040"/>
+            <a:off x="640080" y="4343400"/>
+            <a:ext cx="9144000" cy="2011680"/>
           </a:xfrm>
           <a:prstGeom prst="rect">
             <a:avLst/>
@@ -4757,7 +4757,21 @@
                   <a:srgbClr val="6E8E94"/>
                 </a:solidFill>
               </a:rPr>
-              <a:t>Батыршин Ильназ · Лицей-интернат имени Мустафы Онджеля</a:t>
+              <a:t>Батыршин Ильназ</a:t>
+            </a:r>
+            <a:endParaRPr lang="en-US" sz="2200" dirty="0"/>
+          </a:p>
+          <a:p>
+            <a:pPr indent="0" marL="0">
+              <a:buNone/>
+            </a:pPr>
+            <a:r>
+              <a:rPr lang="en-US" sz="1300" dirty="0">
+                <a:solidFill>
+                  <a:srgbClr val="6E8E94"/>
+                </a:solidFill>
+              </a:rPr>
+              <a:t>Лицей-интернат имени Мустафы Онджеля</a:t>
             </a:r>
             <a:endParaRPr lang="en-US" sz="2200" dirty="0"/>
           </a:p>
